--- a/assets/powerpoints/module-n1-presenter/B2-je-suis-j-ai-je-viens-de.pptx
+++ b/assets/powerpoints/module-n1-presenter/B2-je-suis-j-ai-je-viens-de.pptx
@@ -12871,7 +12871,151 @@
                 </a:solidFill>
                 <a:latin typeface="Verdana"/>
               </a:rPr>
-              <a:t>Devant une &lt;b&gt;ville&lt;/b&gt; : &lt;b&gt;à&lt;/b&gt; Montréal, &lt;b&gt;à&lt;/b&gt; Laval, &lt;b&gt;à&lt;/b&gt; Québec. Devant un &lt;b&gt;pays&lt;/b&gt; : &lt;b&gt;au&lt;/b&gt; Canada, &lt;b&gt;en&lt;/b&gt; France, &lt;b&gt;au&lt;/b&gt; Vietnam.</a:t>
+              <a:t>Devant une </a:t>
+            </a:r>
+            <a:r>
+              <a:rPr sz="2000" b="1" i="0">
+                <a:solidFill>
+                  <a:srgbClr val="4B4F52"/>
+                </a:solidFill>
+                <a:latin typeface="Verdana"/>
+              </a:rPr>
+              <a:t>ville</a:t>
+            </a:r>
+            <a:r>
+              <a:rPr sz="2000" b="0" i="0">
+                <a:solidFill>
+                  <a:srgbClr val="4B4F52"/>
+                </a:solidFill>
+                <a:latin typeface="Verdana"/>
+              </a:rPr>
+              <a:t> : </a:t>
+            </a:r>
+            <a:r>
+              <a:rPr sz="2000" b="1" i="0">
+                <a:solidFill>
+                  <a:srgbClr val="4B4F52"/>
+                </a:solidFill>
+                <a:latin typeface="Verdana"/>
+              </a:rPr>
+              <a:t>à</a:t>
+            </a:r>
+            <a:r>
+              <a:rPr sz="2000" b="0" i="0">
+                <a:solidFill>
+                  <a:srgbClr val="4B4F52"/>
+                </a:solidFill>
+                <a:latin typeface="Verdana"/>
+              </a:rPr>
+              <a:t> Montréal, </a:t>
+            </a:r>
+            <a:r>
+              <a:rPr sz="2000" b="1" i="0">
+                <a:solidFill>
+                  <a:srgbClr val="4B4F52"/>
+                </a:solidFill>
+                <a:latin typeface="Verdana"/>
+              </a:rPr>
+              <a:t>à</a:t>
+            </a:r>
+            <a:r>
+              <a:rPr sz="2000" b="0" i="0">
+                <a:solidFill>
+                  <a:srgbClr val="4B4F52"/>
+                </a:solidFill>
+                <a:latin typeface="Verdana"/>
+              </a:rPr>
+              <a:t> Laval, </a:t>
+            </a:r>
+            <a:r>
+              <a:rPr sz="2000" b="1" i="0">
+                <a:solidFill>
+                  <a:srgbClr val="4B4F52"/>
+                </a:solidFill>
+                <a:latin typeface="Verdana"/>
+              </a:rPr>
+              <a:t>à</a:t>
+            </a:r>
+            <a:r>
+              <a:rPr sz="2000" b="0" i="0">
+                <a:solidFill>
+                  <a:srgbClr val="4B4F52"/>
+                </a:solidFill>
+                <a:latin typeface="Verdana"/>
+              </a:rPr>
+              <a:t> Québec. Devant un </a:t>
+            </a:r>
+            <a:r>
+              <a:rPr sz="2000" b="1" i="0">
+                <a:solidFill>
+                  <a:srgbClr val="4B4F52"/>
+                </a:solidFill>
+                <a:latin typeface="Verdana"/>
+              </a:rPr>
+              <a:t>pays</a:t>
+            </a:r>
+            <a:r>
+              <a:rPr sz="2000" b="0" i="0">
+                <a:solidFill>
+                  <a:srgbClr val="4B4F52"/>
+                </a:solidFill>
+                <a:latin typeface="Verdana"/>
+              </a:rPr>
+              <a:t> : </a:t>
+            </a:r>
+            <a:r>
+              <a:rPr sz="2000" b="1" i="0">
+                <a:solidFill>
+                  <a:srgbClr val="4B4F52"/>
+                </a:solidFill>
+                <a:latin typeface="Verdana"/>
+              </a:rPr>
+              <a:t>au</a:t>
+            </a:r>
+            <a:r>
+              <a:rPr sz="2000" b="0" i="0">
+                <a:solidFill>
+                  <a:srgbClr val="4B4F52"/>
+                </a:solidFill>
+                <a:latin typeface="Verdana"/>
+              </a:rPr>
+              <a:t> Canada, </a:t>
+            </a:r>
+            <a:r>
+              <a:rPr sz="2000" b="1" i="0">
+                <a:solidFill>
+                  <a:srgbClr val="4B4F52"/>
+                </a:solidFill>
+                <a:latin typeface="Verdana"/>
+              </a:rPr>
+              <a:t>en</a:t>
+            </a:r>
+            <a:r>
+              <a:rPr sz="2000" b="0" i="0">
+                <a:solidFill>
+                  <a:srgbClr val="4B4F52"/>
+                </a:solidFill>
+                <a:latin typeface="Verdana"/>
+              </a:rPr>
+              <a:t> France, </a:t>
+            </a:r>
+            <a:r>
+              <a:rPr sz="2000" b="1" i="0">
+                <a:solidFill>
+                  <a:srgbClr val="4B4F52"/>
+                </a:solidFill>
+                <a:latin typeface="Verdana"/>
+              </a:rPr>
+              <a:t>au</a:t>
+            </a:r>
+            <a:r>
+              <a:rPr sz="2000" b="0" i="0">
+                <a:solidFill>
+                  <a:srgbClr val="4B4F52"/>
+                </a:solidFill>
+                <a:latin typeface="Verdana"/>
+              </a:rPr>
+              <a:t> Vietnam.</a:t>
             </a:r>
           </a:p>
         </p:txBody>
